--- a/docs/quickguides/en/cars/pptx/14_Quick_Guide_oneSCM_Marktrolle_Produkt_und_Preispflege_sowie_Administration_EN_Cars.pptx
+++ b/docs/quickguides/en/cars/pptx/14_Quick_Guide_oneSCM_Marktrolle_Produkt_und_Preispflege_sowie_Administration_EN_Cars.pptx
@@ -1503,7 +1503,7 @@
                 <a:ea typeface="MB Corpo S Text Office" pitchFamily="34" charset="-122"/>
                 <a:cs typeface="MB Corpo S Text Office" pitchFamily="34" charset="-120"/>
               </a:rPr>
-              <a:t>This document is interactive – references to handbook chapters and systems are provided as links.</a:t>
+              <a:t>References to handbook chapters and systems are highlighted; e-mail addresses are provided as links.</a:t>
             </a:r>
             <a:endParaRPr lang="en-US" sz="900" dirty="0"/>
           </a:p>
@@ -3441,11 +3441,11 @@
         <p:spPr>
           <a:xfrm>
             <a:off x="201168" y="4242816"/>
-            <a:ext cx="4663440" cy="1316736"/>
+            <a:ext cx="4663440" cy="1792224"/>
           </a:xfrm>
           <a:prstGeom prst="roundRect">
             <a:avLst>
-              <a:gd name="adj" fmla="val 6944"/>
+              <a:gd name="adj" fmla="val 5102"/>
             </a:avLst>
           </a:prstGeom>
           <a:solidFill>
@@ -3509,7 +3509,7 @@
         <p:spPr>
           <a:xfrm>
             <a:off x="310896" y="4590288"/>
-            <a:ext cx="4480560" cy="914400"/>
+            <a:ext cx="4480560" cy="1389888"/>
           </a:xfrm>
           <a:prstGeom prst="rect">
             <a:avLst/>
@@ -3537,7 +3537,7 @@
                 <a:ea typeface="MB Corpo S Text Office" pitchFamily="34" charset="-122"/>
                 <a:cs typeface="MB Corpo S Text Office" pitchFamily="34" charset="-120"/>
               </a:rPr>
-              <a:t>Country deviations must be documented in the register (Chapter 20.6); otherwise the Blueprint applies.</a:t>
+              <a:t>A cluster for the relative base price requires a price factor (14.9).</a:t>
             </a:r>
             <a:endParaRPr lang="en-US" sz="900" dirty="0"/>
           </a:p>
@@ -3558,7 +3558,7 @@
                 <a:ea typeface="MB Corpo S Text Office" pitchFamily="34" charset="-122"/>
                 <a:cs typeface="MB Corpo S Text Office" pitchFamily="34" charset="-120"/>
               </a:rPr>
-              <a:t>Depending on versioning, product changes affect only new contracts or existing contracts as well (14.10).</a:t>
+              <a:t>Vehicle groups: the product with a current price version is preselected, expired price versions are not shown; on request the system generates name and description from the filters (14.11).</a:t>
             </a:r>
             <a:endParaRPr lang="en-US" sz="900" dirty="0"/>
           </a:p>
@@ -3579,7 +3579,28 @@
                 <a:ea typeface="MB Corpo S Text Office" pitchFamily="34" charset="-122"/>
                 <a:cs typeface="MB Corpo S Text Office" pitchFamily="34" charset="-120"/>
               </a:rPr>
-              <a:t>Transition modules T14-15 and T15-14 describe the interaction with HQ.</a:t>
+              <a:t>When a campaign is duplicated, the system resets the External Campaign ID; deactivated campaigns remain editable (14.13).</a:t>
+            </a:r>
+            <a:endParaRPr lang="en-US" sz="900" dirty="0"/>
+          </a:p>
+          <a:p>
+            <a:pPr marL="152400" indent="-152400">
+              <a:spcAft>
+                <a:spcPts val="200"/>
+              </a:spcAft>
+              <a:buSzPct val="100000"/>
+              <a:buChar char="•"/>
+            </a:pPr>
+            <a:r>
+              <a:rPr lang="en-US" sz="900" dirty="0">
+                <a:solidFill>
+                  <a:srgbClr val="262626"/>
+                </a:solidFill>
+                <a:latin typeface="MB Corpo S Text Office" pitchFamily="34" charset="0"/>
+                <a:ea typeface="MB Corpo S Text Office" pitchFamily="34" charset="-122"/>
+                <a:cs typeface="MB Corpo S Text Office" pitchFamily="34" charset="-120"/>
+              </a:rPr>
+              <a:t>Depending on versioning, product changes affect only new contracts or existing contracts as well (14.10).</a:t>
             </a:r>
             <a:endParaRPr lang="en-US" sz="900" dirty="0"/>
           </a:p>
